--- a/reports/slide_deck_executivo.pptx
+++ b/reports/slide_deck_executivo.pptx
@@ -5,18 +5,18 @@
     <p:sldMasterId id="2147483648" r:id="rId1"/>
   </p:sldMasterIdLst>
   <p:sldIdLst>
-    <p:sldId id="256" r:id="rId7"/>
-    <p:sldId id="257" r:id="rId8"/>
-    <p:sldId id="258" r:id="rId9"/>
-    <p:sldId id="259" r:id="rId10"/>
-    <p:sldId id="260" r:id="rId11"/>
-    <p:sldId id="261" r:id="rId12"/>
-    <p:sldId id="262" r:id="rId13"/>
-    <p:sldId id="263" r:id="rId14"/>
-    <p:sldId id="264" r:id="rId15"/>
-    <p:sldId id="265" r:id="rId16"/>
+    <p:sldId id="256" r:id="rId2"/>
+    <p:sldId id="257" r:id="rId3"/>
+    <p:sldId id="258" r:id="rId4"/>
+    <p:sldId id="259" r:id="rId5"/>
+    <p:sldId id="260" r:id="rId6"/>
+    <p:sldId id="261" r:id="rId7"/>
+    <p:sldId id="262" r:id="rId8"/>
+    <p:sldId id="263" r:id="rId9"/>
+    <p:sldId id="264" r:id="rId10"/>
+    <p:sldId id="265" r:id="rId11"/>
   </p:sldIdLst>
-  <p:sldSz cx="12188952" cy="6858000" type="screen4x3"/>
+  <p:sldSz cx="12188825" cy="6858000"/>
   <p:notesSz cx="6858000" cy="9144000"/>
   <p:defaultTextStyle>
     <a:defPPr>
@@ -113,7 +113,60 @@
       </a:defRPr>
     </a:lvl9pPr>
   </p:defaultTextStyle>
+  <p:extLst>
+    <p:ext uri="{EFAFB233-063F-42B5-8137-9DF3F51BA10A}">
+      <p15:sldGuideLst xmlns:p15="http://schemas.microsoft.com/office/powerpoint/2012/main">
+        <p15:guide id="1" orient="horz" pos="2160">
+          <p15:clr>
+            <a:srgbClr val="A4A3A4"/>
+          </p15:clr>
+        </p15:guide>
+        <p15:guide id="2" pos="2880">
+          <p15:clr>
+            <a:srgbClr val="A4A3A4"/>
+          </p15:clr>
+        </p15:guide>
+      </p15:sldGuideLst>
+    </p:ext>
+  </p:extLst>
 </p:presentation>
+</file>
+
+<file path=ppt/changesInfos/changesInfo1.xml><?xml version="1.0" encoding="utf-8"?>
+<pc:chgInfo xmlns:a="http://schemas.openxmlformats.org/drawingml/2006/main" xmlns:r="http://schemas.openxmlformats.org/officeDocument/2006/relationships" xmlns:ac="http://schemas.microsoft.com/office/drawing/2013/main/command" xmlns:pc="http://schemas.microsoft.com/office/powerpoint/2013/main/command">
+  <pc:docChgLst>
+    <pc:chgData name="Figueiredo, Caio Glech Estrella De" userId="c26b7eb9-a502-40b4-ae35-fdb62e2ca217" providerId="ADAL" clId="{56D5A319-6B99-4B68-A680-CAF3D4FCBE59}"/>
+    <pc:docChg chg="modSld">
+      <pc:chgData name="Figueiredo, Caio Glech Estrella De" userId="c26b7eb9-a502-40b4-ae35-fdb62e2ca217" providerId="ADAL" clId="{56D5A319-6B99-4B68-A680-CAF3D4FCBE59}" dt="2026-04-29T16:36:59.585" v="2" actId="1076"/>
+      <pc:docMkLst>
+        <pc:docMk/>
+      </pc:docMkLst>
+      <pc:sldChg chg="modSp mod">
+        <pc:chgData name="Figueiredo, Caio Glech Estrella De" userId="c26b7eb9-a502-40b4-ae35-fdb62e2ca217" providerId="ADAL" clId="{56D5A319-6B99-4B68-A680-CAF3D4FCBE59}" dt="2026-04-29T16:36:59.585" v="2" actId="1076"/>
+        <pc:sldMkLst>
+          <pc:docMk/>
+          <pc:sldMk cId="0" sldId="258"/>
+        </pc:sldMkLst>
+        <pc:spChg chg="mod">
+          <ac:chgData name="Figueiredo, Caio Glech Estrella De" userId="c26b7eb9-a502-40b4-ae35-fdb62e2ca217" providerId="ADAL" clId="{56D5A319-6B99-4B68-A680-CAF3D4FCBE59}" dt="2026-04-29T16:36:54.185" v="1" actId="1076"/>
+          <ac:spMkLst>
+            <pc:docMk/>
+            <pc:sldMk cId="0" sldId="258"/>
+            <ac:spMk id="6" creationId="{00000000-0000-0000-0000-000000000000}"/>
+          </ac:spMkLst>
+        </pc:spChg>
+        <pc:graphicFrameChg chg="mod modGraphic">
+          <ac:chgData name="Figueiredo, Caio Glech Estrella De" userId="c26b7eb9-a502-40b4-ae35-fdb62e2ca217" providerId="ADAL" clId="{56D5A319-6B99-4B68-A680-CAF3D4FCBE59}" dt="2026-04-29T16:36:59.585" v="2" actId="1076"/>
+          <ac:graphicFrameMkLst>
+            <pc:docMk/>
+            <pc:sldMk cId="0" sldId="258"/>
+            <ac:graphicFrameMk id="12" creationId="{00000000-0000-0000-0000-000000000000}"/>
+          </ac:graphicFrameMkLst>
+        </pc:graphicFrameChg>
+      </pc:sldChg>
+    </pc:docChg>
+  </pc:docChgLst>
+</pc:chgInfo>
 </file>
 
 <file path=ppt/slideLayouts/slideLayout1.xml><?xml version="1.0" encoding="utf-8"?>
@@ -154,10 +207,9 @@
           <a:lstStyle/>
           <a:p>
             <a:r>
-              <a:rPr lang="en-US" smtClean="0"/>
+              <a:rPr lang="en-US"/>
               <a:t>Click to edit Master title style</a:t>
             </a:r>
-            <a:endParaRPr lang="en-US"/>
           </a:p>
         </p:txBody>
       </p:sp>
@@ -273,10 +325,9 @@
           </a:lstStyle>
           <a:p>
             <a:r>
-              <a:rPr lang="en-US" smtClean="0"/>
+              <a:rPr lang="en-US"/>
               <a:t>Click to edit Master subtitle style</a:t>
             </a:r>
-            <a:endParaRPr lang="en-US"/>
           </a:p>
         </p:txBody>
       </p:sp>
@@ -297,7 +348,7 @@
           <a:p>
             <a:fld id="{5BCAD085-E8A6-8845-BD4E-CB4CCA059FC4}" type="datetimeFigureOut">
               <a:rPr lang="en-US" smtClean="0"/>
-              <a:t>1/27/13</a:t>
+              <a:t>4/29/2026</a:t>
             </a:fld>
             <a:endParaRPr lang="en-US"/>
           </a:p>
@@ -391,10 +442,9 @@
           <a:lstStyle/>
           <a:p>
             <a:r>
-              <a:rPr lang="en-US" smtClean="0"/>
+              <a:rPr lang="en-US"/>
               <a:t>Click to edit Master title style</a:t>
             </a:r>
-            <a:endParaRPr lang="en-US"/>
           </a:p>
         </p:txBody>
       </p:sp>
@@ -415,38 +465,37 @@
           <a:p>
             <a:pPr lvl="0"/>
             <a:r>
-              <a:rPr lang="en-US" smtClean="0"/>
+              <a:rPr lang="en-US"/>
               <a:t>Click to edit Master text styles</a:t>
             </a:r>
           </a:p>
           <a:p>
             <a:pPr lvl="1"/>
             <a:r>
-              <a:rPr lang="en-US" smtClean="0"/>
+              <a:rPr lang="en-US"/>
               <a:t>Second level</a:t>
             </a:r>
           </a:p>
           <a:p>
             <a:pPr lvl="2"/>
             <a:r>
-              <a:rPr lang="en-US" smtClean="0"/>
+              <a:rPr lang="en-US"/>
               <a:t>Third level</a:t>
             </a:r>
           </a:p>
           <a:p>
             <a:pPr lvl="3"/>
             <a:r>
-              <a:rPr lang="en-US" smtClean="0"/>
+              <a:rPr lang="en-US"/>
               <a:t>Fourth level</a:t>
             </a:r>
           </a:p>
           <a:p>
             <a:pPr lvl="4"/>
             <a:r>
-              <a:rPr lang="en-US" smtClean="0"/>
+              <a:rPr lang="en-US"/>
               <a:t>Fifth level</a:t>
             </a:r>
-            <a:endParaRPr lang="en-US"/>
           </a:p>
         </p:txBody>
       </p:sp>
@@ -467,7 +516,7 @@
           <a:p>
             <a:fld id="{5BCAD085-E8A6-8845-BD4E-CB4CCA059FC4}" type="datetimeFigureOut">
               <a:rPr lang="en-US" smtClean="0"/>
-              <a:t>1/27/13</a:t>
+              <a:t>4/29/2026</a:t>
             </a:fld>
             <a:endParaRPr lang="en-US"/>
           </a:p>
@@ -566,10 +615,9 @@
           <a:lstStyle/>
           <a:p>
             <a:r>
-              <a:rPr lang="en-US" smtClean="0"/>
+              <a:rPr lang="en-US"/>
               <a:t>Click to edit Master title style</a:t>
             </a:r>
-            <a:endParaRPr lang="en-US"/>
           </a:p>
         </p:txBody>
       </p:sp>
@@ -595,38 +643,37 @@
           <a:p>
             <a:pPr lvl="0"/>
             <a:r>
-              <a:rPr lang="en-US" smtClean="0"/>
+              <a:rPr lang="en-US"/>
               <a:t>Click to edit Master text styles</a:t>
             </a:r>
           </a:p>
           <a:p>
             <a:pPr lvl="1"/>
             <a:r>
-              <a:rPr lang="en-US" smtClean="0"/>
+              <a:rPr lang="en-US"/>
               <a:t>Second level</a:t>
             </a:r>
           </a:p>
           <a:p>
             <a:pPr lvl="2"/>
             <a:r>
-              <a:rPr lang="en-US" smtClean="0"/>
+              <a:rPr lang="en-US"/>
               <a:t>Third level</a:t>
             </a:r>
           </a:p>
           <a:p>
             <a:pPr lvl="3"/>
             <a:r>
-              <a:rPr lang="en-US" smtClean="0"/>
+              <a:rPr lang="en-US"/>
               <a:t>Fourth level</a:t>
             </a:r>
           </a:p>
           <a:p>
             <a:pPr lvl="4"/>
             <a:r>
-              <a:rPr lang="en-US" smtClean="0"/>
+              <a:rPr lang="en-US"/>
               <a:t>Fifth level</a:t>
             </a:r>
-            <a:endParaRPr lang="en-US"/>
           </a:p>
         </p:txBody>
       </p:sp>
@@ -647,7 +694,7 @@
           <a:p>
             <a:fld id="{5BCAD085-E8A6-8845-BD4E-CB4CCA059FC4}" type="datetimeFigureOut">
               <a:rPr lang="en-US" smtClean="0"/>
-              <a:t>1/27/13</a:t>
+              <a:t>4/29/2026</a:t>
             </a:fld>
             <a:endParaRPr lang="en-US"/>
           </a:p>
@@ -741,10 +788,9 @@
           <a:lstStyle/>
           <a:p>
             <a:r>
-              <a:rPr lang="en-US" smtClean="0"/>
+              <a:rPr lang="en-US"/>
               <a:t>Click to edit Master title style</a:t>
             </a:r>
-            <a:endParaRPr lang="en-US"/>
           </a:p>
         </p:txBody>
       </p:sp>
@@ -765,38 +811,37 @@
           <a:p>
             <a:pPr lvl="0"/>
             <a:r>
-              <a:rPr lang="en-US" smtClean="0"/>
+              <a:rPr lang="en-US"/>
               <a:t>Click to edit Master text styles</a:t>
             </a:r>
           </a:p>
           <a:p>
             <a:pPr lvl="1"/>
             <a:r>
-              <a:rPr lang="en-US" smtClean="0"/>
+              <a:rPr lang="en-US"/>
               <a:t>Second level</a:t>
             </a:r>
           </a:p>
           <a:p>
             <a:pPr lvl="2"/>
             <a:r>
-              <a:rPr lang="en-US" smtClean="0"/>
+              <a:rPr lang="en-US"/>
               <a:t>Third level</a:t>
             </a:r>
           </a:p>
           <a:p>
             <a:pPr lvl="3"/>
             <a:r>
-              <a:rPr lang="en-US" smtClean="0"/>
+              <a:rPr lang="en-US"/>
               <a:t>Fourth level</a:t>
             </a:r>
           </a:p>
           <a:p>
             <a:pPr lvl="4"/>
             <a:r>
-              <a:rPr lang="en-US" smtClean="0"/>
+              <a:rPr lang="en-US"/>
               <a:t>Fifth level</a:t>
             </a:r>
-            <a:endParaRPr lang="en-US"/>
           </a:p>
         </p:txBody>
       </p:sp>
@@ -817,7 +862,7 @@
           <a:p>
             <a:fld id="{5BCAD085-E8A6-8845-BD4E-CB4CCA059FC4}" type="datetimeFigureOut">
               <a:rPr lang="en-US" smtClean="0"/>
-              <a:t>1/27/13</a:t>
+              <a:t>4/29/2026</a:t>
             </a:fld>
             <a:endParaRPr lang="en-US"/>
           </a:p>
@@ -920,10 +965,9 @@
           </a:lstStyle>
           <a:p>
             <a:r>
-              <a:rPr lang="en-US" smtClean="0"/>
+              <a:rPr lang="en-US"/>
               <a:t>Click to edit Master title style</a:t>
             </a:r>
-            <a:endParaRPr lang="en-US"/>
           </a:p>
         </p:txBody>
       </p:sp>
@@ -1040,7 +1084,7 @@
           <a:p>
             <a:pPr lvl="0"/>
             <a:r>
-              <a:rPr lang="en-US" smtClean="0"/>
+              <a:rPr lang="en-US"/>
               <a:t>Click to edit Master text styles</a:t>
             </a:r>
           </a:p>
@@ -1063,7 +1107,7 @@
           <a:p>
             <a:fld id="{5BCAD085-E8A6-8845-BD4E-CB4CCA059FC4}" type="datetimeFigureOut">
               <a:rPr lang="en-US" smtClean="0"/>
-              <a:t>1/27/13</a:t>
+              <a:t>4/29/2026</a:t>
             </a:fld>
             <a:endParaRPr lang="en-US"/>
           </a:p>
@@ -1157,10 +1201,9 @@
           <a:lstStyle/>
           <a:p>
             <a:r>
-              <a:rPr lang="en-US" smtClean="0"/>
+              <a:rPr lang="en-US"/>
               <a:t>Click to edit Master title style</a:t>
             </a:r>
-            <a:endParaRPr lang="en-US"/>
           </a:p>
         </p:txBody>
       </p:sp>
@@ -1214,38 +1257,37 @@
           <a:p>
             <a:pPr lvl="0"/>
             <a:r>
-              <a:rPr lang="en-US" smtClean="0"/>
+              <a:rPr lang="en-US"/>
               <a:t>Click to edit Master text styles</a:t>
             </a:r>
           </a:p>
           <a:p>
             <a:pPr lvl="1"/>
             <a:r>
-              <a:rPr lang="en-US" smtClean="0"/>
+              <a:rPr lang="en-US"/>
               <a:t>Second level</a:t>
             </a:r>
           </a:p>
           <a:p>
             <a:pPr lvl="2"/>
             <a:r>
-              <a:rPr lang="en-US" smtClean="0"/>
+              <a:rPr lang="en-US"/>
               <a:t>Third level</a:t>
             </a:r>
           </a:p>
           <a:p>
             <a:pPr lvl="3"/>
             <a:r>
-              <a:rPr lang="en-US" smtClean="0"/>
+              <a:rPr lang="en-US"/>
               <a:t>Fourth level</a:t>
             </a:r>
           </a:p>
           <a:p>
             <a:pPr lvl="4"/>
             <a:r>
-              <a:rPr lang="en-US" smtClean="0"/>
+              <a:rPr lang="en-US"/>
               <a:t>Fifth level</a:t>
             </a:r>
-            <a:endParaRPr lang="en-US"/>
           </a:p>
         </p:txBody>
       </p:sp>
@@ -1299,38 +1341,37 @@
           <a:p>
             <a:pPr lvl="0"/>
             <a:r>
-              <a:rPr lang="en-US" smtClean="0"/>
+              <a:rPr lang="en-US"/>
               <a:t>Click to edit Master text styles</a:t>
             </a:r>
           </a:p>
           <a:p>
             <a:pPr lvl="1"/>
             <a:r>
-              <a:rPr lang="en-US" smtClean="0"/>
+              <a:rPr lang="en-US"/>
               <a:t>Second level</a:t>
             </a:r>
           </a:p>
           <a:p>
             <a:pPr lvl="2"/>
             <a:r>
-              <a:rPr lang="en-US" smtClean="0"/>
+              <a:rPr lang="en-US"/>
               <a:t>Third level</a:t>
             </a:r>
           </a:p>
           <a:p>
             <a:pPr lvl="3"/>
             <a:r>
-              <a:rPr lang="en-US" smtClean="0"/>
+              <a:rPr lang="en-US"/>
               <a:t>Fourth level</a:t>
             </a:r>
           </a:p>
           <a:p>
             <a:pPr lvl="4"/>
             <a:r>
-              <a:rPr lang="en-US" smtClean="0"/>
+              <a:rPr lang="en-US"/>
               <a:t>Fifth level</a:t>
             </a:r>
-            <a:endParaRPr lang="en-US"/>
           </a:p>
         </p:txBody>
       </p:sp>
@@ -1351,7 +1392,7 @@
           <a:p>
             <a:fld id="{5BCAD085-E8A6-8845-BD4E-CB4CCA059FC4}" type="datetimeFigureOut">
               <a:rPr lang="en-US" smtClean="0"/>
-              <a:t>1/27/13</a:t>
+              <a:t>4/29/2026</a:t>
             </a:fld>
             <a:endParaRPr lang="en-US"/>
           </a:p>
@@ -1449,10 +1490,9 @@
           </a:lstStyle>
           <a:p>
             <a:r>
-              <a:rPr lang="en-US" smtClean="0"/>
+              <a:rPr lang="en-US"/>
               <a:t>Click to edit Master title style</a:t>
             </a:r>
-            <a:endParaRPr lang="en-US"/>
           </a:p>
         </p:txBody>
       </p:sp>
@@ -1515,7 +1555,7 @@
           <a:p>
             <a:pPr lvl="0"/>
             <a:r>
-              <a:rPr lang="en-US" smtClean="0"/>
+              <a:rPr lang="en-US"/>
               <a:t>Click to edit Master text styles</a:t>
             </a:r>
           </a:p>
@@ -1571,38 +1611,37 @@
           <a:p>
             <a:pPr lvl="0"/>
             <a:r>
-              <a:rPr lang="en-US" smtClean="0"/>
+              <a:rPr lang="en-US"/>
               <a:t>Click to edit Master text styles</a:t>
             </a:r>
           </a:p>
           <a:p>
             <a:pPr lvl="1"/>
             <a:r>
-              <a:rPr lang="en-US" smtClean="0"/>
+              <a:rPr lang="en-US"/>
               <a:t>Second level</a:t>
             </a:r>
           </a:p>
           <a:p>
             <a:pPr lvl="2"/>
             <a:r>
-              <a:rPr lang="en-US" smtClean="0"/>
+              <a:rPr lang="en-US"/>
               <a:t>Third level</a:t>
             </a:r>
           </a:p>
           <a:p>
             <a:pPr lvl="3"/>
             <a:r>
-              <a:rPr lang="en-US" smtClean="0"/>
+              <a:rPr lang="en-US"/>
               <a:t>Fourth level</a:t>
             </a:r>
           </a:p>
           <a:p>
             <a:pPr lvl="4"/>
             <a:r>
-              <a:rPr lang="en-US" smtClean="0"/>
+              <a:rPr lang="en-US"/>
               <a:t>Fifth level</a:t>
             </a:r>
-            <a:endParaRPr lang="en-US"/>
           </a:p>
         </p:txBody>
       </p:sp>
@@ -1665,7 +1704,7 @@
           <a:p>
             <a:pPr lvl="0"/>
             <a:r>
-              <a:rPr lang="en-US" smtClean="0"/>
+              <a:rPr lang="en-US"/>
               <a:t>Click to edit Master text styles</a:t>
             </a:r>
           </a:p>
@@ -1721,38 +1760,37 @@
           <a:p>
             <a:pPr lvl="0"/>
             <a:r>
-              <a:rPr lang="en-US" smtClean="0"/>
+              <a:rPr lang="en-US"/>
               <a:t>Click to edit Master text styles</a:t>
             </a:r>
           </a:p>
           <a:p>
             <a:pPr lvl="1"/>
             <a:r>
-              <a:rPr lang="en-US" smtClean="0"/>
+              <a:rPr lang="en-US"/>
               <a:t>Second level</a:t>
             </a:r>
           </a:p>
           <a:p>
             <a:pPr lvl="2"/>
             <a:r>
-              <a:rPr lang="en-US" smtClean="0"/>
+              <a:rPr lang="en-US"/>
               <a:t>Third level</a:t>
             </a:r>
           </a:p>
           <a:p>
             <a:pPr lvl="3"/>
             <a:r>
-              <a:rPr lang="en-US" smtClean="0"/>
+              <a:rPr lang="en-US"/>
               <a:t>Fourth level</a:t>
             </a:r>
           </a:p>
           <a:p>
             <a:pPr lvl="4"/>
             <a:r>
-              <a:rPr lang="en-US" smtClean="0"/>
+              <a:rPr lang="en-US"/>
               <a:t>Fifth level</a:t>
             </a:r>
-            <a:endParaRPr lang="en-US"/>
           </a:p>
         </p:txBody>
       </p:sp>
@@ -1773,7 +1811,7 @@
           <a:p>
             <a:fld id="{5BCAD085-E8A6-8845-BD4E-CB4CCA059FC4}" type="datetimeFigureOut">
               <a:rPr lang="en-US" smtClean="0"/>
-              <a:t>1/27/13</a:t>
+              <a:t>4/29/2026</a:t>
             </a:fld>
             <a:endParaRPr lang="en-US"/>
           </a:p>
@@ -1867,10 +1905,9 @@
           <a:lstStyle/>
           <a:p>
             <a:r>
-              <a:rPr lang="en-US" smtClean="0"/>
+              <a:rPr lang="en-US"/>
               <a:t>Click to edit Master title style</a:t>
             </a:r>
-            <a:endParaRPr lang="en-US"/>
           </a:p>
         </p:txBody>
       </p:sp>
@@ -1891,7 +1928,7 @@
           <a:p>
             <a:fld id="{5BCAD085-E8A6-8845-BD4E-CB4CCA059FC4}" type="datetimeFigureOut">
               <a:rPr lang="en-US" smtClean="0"/>
-              <a:t>1/27/13</a:t>
+              <a:t>4/29/2026</a:t>
             </a:fld>
             <a:endParaRPr lang="en-US"/>
           </a:p>
@@ -1986,7 +2023,7 @@
           <a:p>
             <a:fld id="{5BCAD085-E8A6-8845-BD4E-CB4CCA059FC4}" type="datetimeFigureOut">
               <a:rPr lang="en-US" smtClean="0"/>
-              <a:t>1/27/13</a:t>
+              <a:t>4/29/2026</a:t>
             </a:fld>
             <a:endParaRPr lang="en-US"/>
           </a:p>
@@ -2089,10 +2126,9 @@
           </a:lstStyle>
           <a:p>
             <a:r>
-              <a:rPr lang="en-US" smtClean="0"/>
+              <a:rPr lang="en-US"/>
               <a:t>Click to edit Master title style</a:t>
             </a:r>
-            <a:endParaRPr lang="en-US"/>
           </a:p>
         </p:txBody>
       </p:sp>
@@ -2146,38 +2182,37 @@
           <a:p>
             <a:pPr lvl="0"/>
             <a:r>
-              <a:rPr lang="en-US" smtClean="0"/>
+              <a:rPr lang="en-US"/>
               <a:t>Click to edit Master text styles</a:t>
             </a:r>
           </a:p>
           <a:p>
             <a:pPr lvl="1"/>
             <a:r>
-              <a:rPr lang="en-US" smtClean="0"/>
+              <a:rPr lang="en-US"/>
               <a:t>Second level</a:t>
             </a:r>
           </a:p>
           <a:p>
             <a:pPr lvl="2"/>
             <a:r>
-              <a:rPr lang="en-US" smtClean="0"/>
+              <a:rPr lang="en-US"/>
               <a:t>Third level</a:t>
             </a:r>
           </a:p>
           <a:p>
             <a:pPr lvl="3"/>
             <a:r>
-              <a:rPr lang="en-US" smtClean="0"/>
+              <a:rPr lang="en-US"/>
               <a:t>Fourth level</a:t>
             </a:r>
           </a:p>
           <a:p>
             <a:pPr lvl="4"/>
             <a:r>
-              <a:rPr lang="en-US" smtClean="0"/>
+              <a:rPr lang="en-US"/>
               <a:t>Fifth level</a:t>
             </a:r>
-            <a:endParaRPr lang="en-US"/>
           </a:p>
         </p:txBody>
       </p:sp>
@@ -2240,7 +2275,7 @@
           <a:p>
             <a:pPr lvl="0"/>
             <a:r>
-              <a:rPr lang="en-US" smtClean="0"/>
+              <a:rPr lang="en-US"/>
               <a:t>Click to edit Master text styles</a:t>
             </a:r>
           </a:p>
@@ -2263,7 +2298,7 @@
           <a:p>
             <a:fld id="{5BCAD085-E8A6-8845-BD4E-CB4CCA059FC4}" type="datetimeFigureOut">
               <a:rPr lang="en-US" smtClean="0"/>
-              <a:t>1/27/13</a:t>
+              <a:t>4/29/2026</a:t>
             </a:fld>
             <a:endParaRPr lang="en-US"/>
           </a:p>
@@ -2366,10 +2401,9 @@
           </a:lstStyle>
           <a:p>
             <a:r>
-              <a:rPr lang="en-US" smtClean="0"/>
+              <a:rPr lang="en-US"/>
               <a:t>Click to edit Master title style</a:t>
             </a:r>
-            <a:endParaRPr lang="en-US"/>
           </a:p>
         </p:txBody>
       </p:sp>
@@ -2493,7 +2527,7 @@
           <a:p>
             <a:pPr lvl="0"/>
             <a:r>
-              <a:rPr lang="en-US" smtClean="0"/>
+              <a:rPr lang="en-US"/>
               <a:t>Click to edit Master text styles</a:t>
             </a:r>
           </a:p>
@@ -2516,7 +2550,7 @@
           <a:p>
             <a:fld id="{5BCAD085-E8A6-8845-BD4E-CB4CCA059FC4}" type="datetimeFigureOut">
               <a:rPr lang="en-US" smtClean="0"/>
-              <a:t>1/27/13</a:t>
+              <a:t>4/29/2026</a:t>
             </a:fld>
             <a:endParaRPr lang="en-US"/>
           </a:p>
@@ -2625,10 +2659,9 @@
           <a:lstStyle/>
           <a:p>
             <a:r>
-              <a:rPr lang="en-US" smtClean="0"/>
+              <a:rPr lang="en-US"/>
               <a:t>Click to edit Master title style</a:t>
             </a:r>
-            <a:endParaRPr lang="en-US"/>
           </a:p>
         </p:txBody>
       </p:sp>
@@ -2659,38 +2692,37 @@
           <a:p>
             <a:pPr lvl="0"/>
             <a:r>
-              <a:rPr lang="en-US" smtClean="0"/>
+              <a:rPr lang="en-US"/>
               <a:t>Click to edit Master text styles</a:t>
             </a:r>
           </a:p>
           <a:p>
             <a:pPr lvl="1"/>
             <a:r>
-              <a:rPr lang="en-US" smtClean="0"/>
+              <a:rPr lang="en-US"/>
               <a:t>Second level</a:t>
             </a:r>
           </a:p>
           <a:p>
             <a:pPr lvl="2"/>
             <a:r>
-              <a:rPr lang="en-US" smtClean="0"/>
+              <a:rPr lang="en-US"/>
               <a:t>Third level</a:t>
             </a:r>
           </a:p>
           <a:p>
             <a:pPr lvl="3"/>
             <a:r>
-              <a:rPr lang="en-US" smtClean="0"/>
+              <a:rPr lang="en-US"/>
               <a:t>Fourth level</a:t>
             </a:r>
           </a:p>
           <a:p>
             <a:pPr lvl="4"/>
             <a:r>
-              <a:rPr lang="en-US" smtClean="0"/>
+              <a:rPr lang="en-US"/>
               <a:t>Fifth level</a:t>
             </a:r>
-            <a:endParaRPr lang="en-US"/>
           </a:p>
         </p:txBody>
       </p:sp>
@@ -2729,7 +2761,7 @@
           <a:p>
             <a:fld id="{5BCAD085-E8A6-8845-BD4E-CB4CCA059FC4}" type="datetimeFigureOut">
               <a:rPr lang="en-US" smtClean="0"/>
-              <a:t>1/27/13</a:t>
+              <a:t>4/29/2026</a:t>
             </a:fld>
             <a:endParaRPr lang="en-US"/>
           </a:p>
@@ -3088,7 +3120,7 @@
 </file>
 
 <file path=ppt/slides/slide1.xml><?xml version="1.0" encoding="utf-8"?>
-<p:sld xmlns:a="http://schemas.openxmlformats.org/drawingml/2006/main" xmlns:p="http://schemas.openxmlformats.org/presentationml/2006/main" xmlns:r="http://schemas.openxmlformats.org/officeDocument/2006/relationships">
+<p:sld xmlns:a="http://schemas.openxmlformats.org/drawingml/2006/main" xmlns:r="http://schemas.openxmlformats.org/officeDocument/2006/relationships" xmlns:p="http://schemas.openxmlformats.org/presentationml/2006/main">
   <p:cSld>
     <p:spTree>
       <p:nvGrpSpPr>
@@ -3096,7 +3128,14 @@
         <p:cNvGrpSpPr/>
         <p:nvPr/>
       </p:nvGrpSpPr>
-      <p:grpSpPr/>
+      <p:grpSpPr>
+        <a:xfrm>
+          <a:off x="0" y="0"/>
+          <a:ext cx="0" cy="0"/>
+          <a:chOff x="0" y="0"/>
+          <a:chExt cx="0" cy="0"/>
+        </a:xfrm>
+      </p:grpSpPr>
       <p:sp>
         <p:nvSpPr>
           <p:cNvPr id="2" name="Rectangle 1"/>
@@ -3137,6 +3176,7 @@
           <a:lstStyle/>
           <a:p>
             <a:pPr algn="ctr"/>
+            <a:endParaRPr/>
           </a:p>
         </p:txBody>
       </p:sp>
@@ -3180,6 +3220,7 @@
           <a:lstStyle/>
           <a:p>
             <a:pPr algn="ctr"/>
+            <a:endParaRPr/>
           </a:p>
         </p:txBody>
       </p:sp>
@@ -3223,6 +3264,7 @@
           <a:lstStyle/>
           <a:p>
             <a:pPr algn="ctr"/>
+            <a:endParaRPr/>
           </a:p>
         </p:txBody>
       </p:sp>
@@ -3266,6 +3308,7 @@
           <a:lstStyle/>
           <a:p>
             <a:pPr algn="ctr"/>
+            <a:endParaRPr/>
           </a:p>
         </p:txBody>
       </p:sp>
@@ -3309,6 +3352,7 @@
           <a:lstStyle/>
           <a:p>
             <a:pPr algn="ctr"/>
+            <a:endParaRPr/>
           </a:p>
         </p:txBody>
       </p:sp>
@@ -3420,6 +3464,7 @@
           <a:lstStyle/>
           <a:p>
             <a:pPr algn="ctr"/>
+            <a:endParaRPr/>
           </a:p>
         </p:txBody>
       </p:sp>
@@ -3738,7 +3783,7 @@
 </file>
 
 <file path=ppt/slides/slide10.xml><?xml version="1.0" encoding="utf-8"?>
-<p:sld xmlns:a="http://schemas.openxmlformats.org/drawingml/2006/main" xmlns:p="http://schemas.openxmlformats.org/presentationml/2006/main" xmlns:r="http://schemas.openxmlformats.org/officeDocument/2006/relationships">
+<p:sld xmlns:a="http://schemas.openxmlformats.org/drawingml/2006/main" xmlns:r="http://schemas.openxmlformats.org/officeDocument/2006/relationships" xmlns:p="http://schemas.openxmlformats.org/presentationml/2006/main">
   <p:cSld>
     <p:spTree>
       <p:nvGrpSpPr>
@@ -3746,7 +3791,14 @@
         <p:cNvGrpSpPr/>
         <p:nvPr/>
       </p:nvGrpSpPr>
-      <p:grpSpPr/>
+      <p:grpSpPr>
+        <a:xfrm>
+          <a:off x="0" y="0"/>
+          <a:ext cx="0" cy="0"/>
+          <a:chOff x="0" y="0"/>
+          <a:chExt cx="0" cy="0"/>
+        </a:xfrm>
+      </p:grpSpPr>
       <p:sp>
         <p:nvSpPr>
           <p:cNvPr id="2" name="Rectangle 1"/>
@@ -3787,6 +3839,7 @@
           <a:lstStyle/>
           <a:p>
             <a:pPr algn="ctr"/>
+            <a:endParaRPr/>
           </a:p>
         </p:txBody>
       </p:sp>
@@ -3830,6 +3883,7 @@
           <a:lstStyle/>
           <a:p>
             <a:pPr algn="ctr"/>
+            <a:endParaRPr/>
           </a:p>
         </p:txBody>
       </p:sp>
@@ -3873,6 +3927,7 @@
           <a:lstStyle/>
           <a:p>
             <a:pPr algn="ctr"/>
+            <a:endParaRPr/>
           </a:p>
         </p:txBody>
       </p:sp>
@@ -3984,6 +4039,7 @@
           <a:lstStyle/>
           <a:p>
             <a:pPr algn="ctr"/>
+            <a:endParaRPr/>
           </a:p>
         </p:txBody>
       </p:sp>
@@ -4027,6 +4083,7 @@
           <a:lstStyle/>
           <a:p>
             <a:pPr algn="ctr"/>
+            <a:endParaRPr/>
           </a:p>
         </p:txBody>
       </p:sp>
@@ -4070,6 +4127,7 @@
           <a:lstStyle/>
           <a:p>
             <a:pPr algn="ctr"/>
+            <a:endParaRPr/>
           </a:p>
         </p:txBody>
       </p:sp>
@@ -4657,6 +4715,7 @@
           <a:lstStyle/>
           <a:p>
             <a:pPr algn="ctr"/>
+            <a:endParaRPr/>
           </a:p>
         </p:txBody>
       </p:sp>
@@ -4768,6 +4827,7 @@
           <a:lstStyle/>
           <a:p>
             <a:pPr algn="ctr"/>
+            <a:endParaRPr/>
           </a:p>
         </p:txBody>
       </p:sp>
@@ -4879,6 +4939,7 @@
           <a:lstStyle/>
           <a:p>
             <a:pPr algn="ctr"/>
+            <a:endParaRPr/>
           </a:p>
         </p:txBody>
       </p:sp>
@@ -4990,6 +5051,7 @@
           <a:lstStyle/>
           <a:p>
             <a:pPr algn="ctr"/>
+            <a:endParaRPr/>
           </a:p>
         </p:txBody>
       </p:sp>
@@ -5101,6 +5163,7 @@
           <a:lstStyle/>
           <a:p>
             <a:pPr algn="ctr"/>
+            <a:endParaRPr/>
           </a:p>
         </p:txBody>
       </p:sp>
@@ -5214,6 +5277,7 @@
           <a:lstStyle/>
           <a:p>
             <a:pPr algn="ctr"/>
+            <a:endParaRPr/>
           </a:p>
         </p:txBody>
       </p:sp>
@@ -5260,7 +5324,7 @@
 </file>
 
 <file path=ppt/slides/slide2.xml><?xml version="1.0" encoding="utf-8"?>
-<p:sld xmlns:a="http://schemas.openxmlformats.org/drawingml/2006/main" xmlns:p="http://schemas.openxmlformats.org/presentationml/2006/main" xmlns:r="http://schemas.openxmlformats.org/officeDocument/2006/relationships">
+<p:sld xmlns:a="http://schemas.openxmlformats.org/drawingml/2006/main" xmlns:r="http://schemas.openxmlformats.org/officeDocument/2006/relationships" xmlns:p="http://schemas.openxmlformats.org/presentationml/2006/main">
   <p:cSld>
     <p:spTree>
       <p:nvGrpSpPr>
@@ -5268,7 +5332,14 @@
         <p:cNvGrpSpPr/>
         <p:nvPr/>
       </p:nvGrpSpPr>
-      <p:grpSpPr/>
+      <p:grpSpPr>
+        <a:xfrm>
+          <a:off x="0" y="0"/>
+          <a:ext cx="0" cy="0"/>
+          <a:chOff x="0" y="0"/>
+          <a:chExt cx="0" cy="0"/>
+        </a:xfrm>
+      </p:grpSpPr>
       <p:sp>
         <p:nvSpPr>
           <p:cNvPr id="2" name="Rectangle 1"/>
@@ -5309,6 +5380,7 @@
           <a:lstStyle/>
           <a:p>
             <a:pPr algn="ctr"/>
+            <a:endParaRPr/>
           </a:p>
         </p:txBody>
       </p:sp>
@@ -5352,6 +5424,7 @@
           <a:lstStyle/>
           <a:p>
             <a:pPr algn="ctr"/>
+            <a:endParaRPr/>
           </a:p>
         </p:txBody>
       </p:sp>
@@ -5395,6 +5468,7 @@
           <a:lstStyle/>
           <a:p>
             <a:pPr algn="ctr"/>
+            <a:endParaRPr/>
           </a:p>
         </p:txBody>
       </p:sp>
@@ -5472,6 +5546,7 @@
           <a:lstStyle/>
           <a:p>
             <a:pPr algn="ctr"/>
+            <a:endParaRPr/>
           </a:p>
         </p:txBody>
       </p:sp>
@@ -5515,6 +5590,7 @@
           <a:lstStyle/>
           <a:p>
             <a:pPr algn="ctr"/>
+            <a:endParaRPr/>
           </a:p>
         </p:txBody>
       </p:sp>
@@ -5558,6 +5634,7 @@
           <a:lstStyle/>
           <a:p>
             <a:pPr algn="ctr"/>
+            <a:endParaRPr/>
           </a:p>
         </p:txBody>
       </p:sp>
@@ -5671,6 +5748,7 @@
           <a:lstStyle/>
           <a:p>
             <a:pPr algn="ctr"/>
+            <a:endParaRPr/>
           </a:p>
         </p:txBody>
       </p:sp>
@@ -5818,6 +5896,7 @@
           <a:lstStyle/>
           <a:p>
             <a:pPr algn="ctr"/>
+            <a:endParaRPr/>
           </a:p>
         </p:txBody>
       </p:sp>
@@ -5965,6 +6044,7 @@
           <a:lstStyle/>
           <a:p>
             <a:pPr algn="ctr"/>
+            <a:endParaRPr/>
           </a:p>
         </p:txBody>
       </p:sp>
@@ -6112,6 +6192,7 @@
           <a:lstStyle/>
           <a:p>
             <a:pPr algn="ctr"/>
+            <a:endParaRPr/>
           </a:p>
         </p:txBody>
       </p:sp>
@@ -6259,6 +6340,7 @@
           <a:lstStyle/>
           <a:p>
             <a:pPr algn="ctr"/>
+            <a:endParaRPr/>
           </a:p>
         </p:txBody>
       </p:sp>
@@ -6305,7 +6387,7 @@
 </file>
 
 <file path=ppt/slides/slide3.xml><?xml version="1.0" encoding="utf-8"?>
-<p:sld xmlns:a="http://schemas.openxmlformats.org/drawingml/2006/main" xmlns:p="http://schemas.openxmlformats.org/presentationml/2006/main" xmlns:r="http://schemas.openxmlformats.org/officeDocument/2006/relationships">
+<p:sld xmlns:a="http://schemas.openxmlformats.org/drawingml/2006/main" xmlns:r="http://schemas.openxmlformats.org/officeDocument/2006/relationships" xmlns:p="http://schemas.openxmlformats.org/presentationml/2006/main">
   <p:cSld>
     <p:spTree>
       <p:nvGrpSpPr>
@@ -6313,7 +6395,14 @@
         <p:cNvGrpSpPr/>
         <p:nvPr/>
       </p:nvGrpSpPr>
-      <p:grpSpPr/>
+      <p:grpSpPr>
+        <a:xfrm>
+          <a:off x="0" y="0"/>
+          <a:ext cx="0" cy="0"/>
+          <a:chOff x="0" y="0"/>
+          <a:chExt cx="0" cy="0"/>
+        </a:xfrm>
+      </p:grpSpPr>
       <p:sp>
         <p:nvSpPr>
           <p:cNvPr id="2" name="Rectangle 1"/>
@@ -6354,6 +6443,7 @@
           <a:lstStyle/>
           <a:p>
             <a:pPr algn="ctr"/>
+            <a:endParaRPr/>
           </a:p>
         </p:txBody>
       </p:sp>
@@ -6397,6 +6487,7 @@
           <a:lstStyle/>
           <a:p>
             <a:pPr algn="ctr"/>
+            <a:endParaRPr/>
           </a:p>
         </p:txBody>
       </p:sp>
@@ -6440,6 +6531,7 @@
           <a:lstStyle/>
           <a:p>
             <a:pPr algn="ctr"/>
+            <a:endParaRPr/>
           </a:p>
         </p:txBody>
       </p:sp>
@@ -6485,7 +6577,7 @@
         </p:nvSpPr>
         <p:spPr>
           <a:xfrm>
-            <a:off x="630936" y="731520"/>
+            <a:off x="630936" y="615054"/>
             <a:ext cx="11027663" cy="256032"/>
           </a:xfrm>
           <a:prstGeom prst="rect">
@@ -6551,6 +6643,7 @@
           <a:lstStyle/>
           <a:p>
             <a:pPr algn="ctr"/>
+            <a:endParaRPr/>
           </a:p>
         </p:txBody>
       </p:sp>
@@ -6594,6 +6687,7 @@
           <a:lstStyle/>
           <a:p>
             <a:pPr algn="ctr"/>
+            <a:endParaRPr/>
           </a:p>
         </p:txBody>
       </p:sp>
@@ -6637,6 +6731,7 @@
           <a:lstStyle/>
           <a:p>
             <a:pPr algn="ctr"/>
+            <a:endParaRPr/>
           </a:p>
         </p:txBody>
       </p:sp>
@@ -6714,11 +6809,17 @@
           <p:cNvGraphicFramePr>
             <a:graphicFrameLocks noGrp="1"/>
           </p:cNvGraphicFramePr>
-          <p:nvPr/>
+          <p:nvPr>
+            <p:extLst>
+              <p:ext uri="{D42A27DB-BD31-4B8C-83A1-F6EECF244321}">
+                <p14:modId xmlns:p14="http://schemas.microsoft.com/office/powerpoint/2010/main" val="4291960228"/>
+              </p:ext>
+            </p:extLst>
+          </p:nvPr>
         </p:nvGraphicFramePr>
         <p:xfrm>
-          <a:off x="502920" y="1033272"/>
-          <a:ext cx="11155680" cy="2331720"/>
+          <a:off x="502920" y="1122936"/>
+          <a:ext cx="11155680" cy="1883664"/>
         </p:xfrm>
         <a:graphic>
           <a:graphicData uri="http://schemas.openxmlformats.org/drawingml/2006/table">
@@ -6727,12 +6828,36 @@
                 <a:tableStyleId>{5C22544A-7EE6-4342-B048-85BDC9FD1C3A}</a:tableStyleId>
               </a:tblPr>
               <a:tblGrid>
-                <a:gridCol w="2788920"/>
-                <a:gridCol w="2788920"/>
-                <a:gridCol w="2788920"/>
-                <a:gridCol w="2788920"/>
+                <a:gridCol w="2788920">
+                  <a:extLst>
+                    <a:ext uri="{9D8B030D-6E8A-4147-A177-3AD203B41FA5}">
+                      <a16:colId xmlns:a16="http://schemas.microsoft.com/office/drawing/2014/main" val="20000"/>
+                    </a:ext>
+                  </a:extLst>
+                </a:gridCol>
+                <a:gridCol w="2788920">
+                  <a:extLst>
+                    <a:ext uri="{9D8B030D-6E8A-4147-A177-3AD203B41FA5}">
+                      <a16:colId xmlns:a16="http://schemas.microsoft.com/office/drawing/2014/main" val="20001"/>
+                    </a:ext>
+                  </a:extLst>
+                </a:gridCol>
+                <a:gridCol w="2788920">
+                  <a:extLst>
+                    <a:ext uri="{9D8B030D-6E8A-4147-A177-3AD203B41FA5}">
+                      <a16:colId xmlns:a16="http://schemas.microsoft.com/office/drawing/2014/main" val="20002"/>
+                    </a:ext>
+                  </a:extLst>
+                </a:gridCol>
+                <a:gridCol w="2788920">
+                  <a:extLst>
+                    <a:ext uri="{9D8B030D-6E8A-4147-A177-3AD203B41FA5}">
+                      <a16:colId xmlns:a16="http://schemas.microsoft.com/office/drawing/2014/main" val="20003"/>
+                    </a:ext>
+                  </a:extLst>
+                </a:gridCol>
               </a:tblGrid>
-              <a:tr h="388620">
+              <a:tr h="313944">
                 <a:tc>
                   <a:txBody>
                     <a:bodyPr/>
@@ -6740,7 +6865,7 @@
                     <a:p>
                       <a:pPr algn="ctr"/>
                       <a:r>
-                        <a:rPr b="1" sz="1100">
+                        <a:rPr sz="1100" b="1">
                           <a:solidFill>
                             <a:srgbClr val="FFFFFF"/>
                           </a:solidFill>
@@ -6762,7 +6887,7 @@
                     <a:p>
                       <a:pPr algn="ctr"/>
                       <a:r>
-                        <a:rPr b="1" sz="1100">
+                        <a:rPr sz="1100" b="1">
                           <a:solidFill>
                             <a:srgbClr val="FFFFFF"/>
                           </a:solidFill>
@@ -6784,7 +6909,7 @@
                     <a:p>
                       <a:pPr algn="ctr"/>
                       <a:r>
-                        <a:rPr b="1" sz="1100">
+                        <a:rPr sz="1100" b="1">
                           <a:solidFill>
                             <a:srgbClr val="FFFFFF"/>
                           </a:solidFill>
@@ -6806,7 +6931,7 @@
                     <a:p>
                       <a:pPr algn="ctr"/>
                       <a:r>
-                        <a:rPr b="1" sz="1100">
+                        <a:rPr sz="1100" b="1">
                           <a:solidFill>
                             <a:srgbClr val="FFFFFF"/>
                           </a:solidFill>
@@ -6821,8 +6946,13 @@
                     </a:solidFill>
                   </a:tcPr>
                 </a:tc>
+                <a:extLst>
+                  <a:ext uri="{0D108BD9-81ED-4DB2-BD59-A6C34878D82A}">
+                    <a16:rowId xmlns:a16="http://schemas.microsoft.com/office/drawing/2014/main" val="10000"/>
+                  </a:ext>
+                </a:extLst>
               </a:tr>
-              <a:tr h="388620">
+              <a:tr h="313944">
                 <a:tc>
                   <a:txBody>
                     <a:bodyPr/>
@@ -6911,8 +7041,13 @@
                     </a:solidFill>
                   </a:tcPr>
                 </a:tc>
+                <a:extLst>
+                  <a:ext uri="{0D108BD9-81ED-4DB2-BD59-A6C34878D82A}">
+                    <a16:rowId xmlns:a16="http://schemas.microsoft.com/office/drawing/2014/main" val="10001"/>
+                  </a:ext>
+                </a:extLst>
               </a:tr>
-              <a:tr h="388620">
+              <a:tr h="313944">
                 <a:tc>
                   <a:txBody>
                     <a:bodyPr/>
@@ -7001,8 +7136,13 @@
                     </a:solidFill>
                   </a:tcPr>
                 </a:tc>
+                <a:extLst>
+                  <a:ext uri="{0D108BD9-81ED-4DB2-BD59-A6C34878D82A}">
+                    <a16:rowId xmlns:a16="http://schemas.microsoft.com/office/drawing/2014/main" val="10002"/>
+                  </a:ext>
+                </a:extLst>
               </a:tr>
-              <a:tr h="388620">
+              <a:tr h="313944">
                 <a:tc>
                   <a:txBody>
                     <a:bodyPr/>
@@ -7054,13 +7194,18 @@
                     <a:p>
                       <a:pPr algn="ctr"/>
                       <a:r>
-                        <a:rPr sz="1100">
+                        <a:rPr sz="1100" dirty="0" err="1">
                           <a:solidFill>
                             <a:srgbClr val="0F172A"/>
                           </a:solidFill>
                         </a:rPr>
                         <a:t>Estático</a:t>
                       </a:r>
+                      <a:endParaRPr sz="1100" dirty="0">
+                        <a:solidFill>
+                          <a:srgbClr val="0F172A"/>
+                        </a:solidFill>
+                      </a:endParaRPr>
                     </a:p>
                   </a:txBody>
                   <a:tcPr>
@@ -7091,8 +7236,13 @@
                     </a:solidFill>
                   </a:tcPr>
                 </a:tc>
+                <a:extLst>
+                  <a:ext uri="{0D108BD9-81ED-4DB2-BD59-A6C34878D82A}">
+                    <a16:rowId xmlns:a16="http://schemas.microsoft.com/office/drawing/2014/main" val="10003"/>
+                  </a:ext>
+                </a:extLst>
               </a:tr>
-              <a:tr h="388620">
+              <a:tr h="313944">
                 <a:tc>
                   <a:txBody>
                     <a:bodyPr/>
@@ -7181,8 +7331,13 @@
                     </a:solidFill>
                   </a:tcPr>
                 </a:tc>
+                <a:extLst>
+                  <a:ext uri="{0D108BD9-81ED-4DB2-BD59-A6C34878D82A}">
+                    <a16:rowId xmlns:a16="http://schemas.microsoft.com/office/drawing/2014/main" val="10004"/>
+                  </a:ext>
+                </a:extLst>
               </a:tr>
-              <a:tr h="388620">
+              <a:tr h="313944">
                 <a:tc>
                   <a:txBody>
                     <a:bodyPr/>
@@ -7256,7 +7411,7 @@
                     <a:p>
                       <a:pPr algn="ctr"/>
                       <a:r>
-                        <a:rPr sz="1100">
+                        <a:rPr sz="1100" dirty="0">
                           <a:solidFill>
                             <a:srgbClr val="0F172A"/>
                           </a:solidFill>
@@ -7271,6 +7426,11 @@
                     </a:solidFill>
                   </a:tcPr>
                 </a:tc>
+                <a:extLst>
+                  <a:ext uri="{0D108BD9-81ED-4DB2-BD59-A6C34878D82A}">
+                    <a16:rowId xmlns:a16="http://schemas.microsoft.com/office/drawing/2014/main" val="10005"/>
+                  </a:ext>
+                </a:extLst>
               </a:tr>
             </a:tbl>
           </a:graphicData>
@@ -7316,6 +7476,7 @@
           <a:lstStyle/>
           <a:p>
             <a:pPr algn="ctr"/>
+            <a:endParaRPr/>
           </a:p>
         </p:txBody>
       </p:sp>
@@ -7357,7 +7518,7 @@
           </a:fontRef>
         </p:style>
         <p:txBody>
-          <a:bodyPr rtlCol="0" anchor="ctr" wrap="square" lIns="137160" tIns="109728"/>
+          <a:bodyPr wrap="square" lIns="137160" tIns="109728" rtlCol="0" anchor="ctr"/>
           <a:lstStyle/>
           <a:p>
             <a:pPr algn="ctr"/>
@@ -7432,6 +7593,7 @@
           <a:lstStyle/>
           <a:p>
             <a:pPr algn="ctr"/>
+            <a:endParaRPr/>
           </a:p>
         </p:txBody>
       </p:sp>
@@ -7473,7 +7635,7 @@
           </a:fontRef>
         </p:style>
         <p:txBody>
-          <a:bodyPr rtlCol="0" anchor="ctr" wrap="square" lIns="137160" tIns="109728"/>
+          <a:bodyPr wrap="square" lIns="137160" tIns="109728" rtlCol="0" anchor="ctr"/>
           <a:lstStyle/>
           <a:p>
             <a:pPr algn="ctr"/>
@@ -7548,6 +7710,7 @@
           <a:lstStyle/>
           <a:p>
             <a:pPr algn="ctr"/>
+            <a:endParaRPr/>
           </a:p>
         </p:txBody>
       </p:sp>
@@ -7589,7 +7752,7 @@
           </a:fontRef>
         </p:style>
         <p:txBody>
-          <a:bodyPr rtlCol="0" anchor="ctr" wrap="square" lIns="137160" tIns="109728"/>
+          <a:bodyPr wrap="square" lIns="137160" tIns="109728" rtlCol="0" anchor="ctr"/>
           <a:lstStyle/>
           <a:p>
             <a:pPr algn="ctr"/>
@@ -7664,6 +7827,7 @@
           <a:lstStyle/>
           <a:p>
             <a:pPr algn="ctr"/>
+            <a:endParaRPr/>
           </a:p>
         </p:txBody>
       </p:sp>
@@ -7705,7 +7869,7 @@
           </a:fontRef>
         </p:style>
         <p:txBody>
-          <a:bodyPr rtlCol="0" anchor="ctr" wrap="square" lIns="137160" tIns="109728"/>
+          <a:bodyPr wrap="square" lIns="137160" tIns="109728" rtlCol="0" anchor="ctr"/>
           <a:lstStyle/>
           <a:p>
             <a:pPr algn="ctr"/>
@@ -7916,6 +8080,7 @@
           <a:lstStyle/>
           <a:p>
             <a:pPr algn="ctr"/>
+            <a:endParaRPr/>
           </a:p>
         </p:txBody>
       </p:sp>
@@ -7993,6 +8158,7 @@
           <a:lstStyle/>
           <a:p>
             <a:pPr algn="ctr"/>
+            <a:endParaRPr/>
           </a:p>
         </p:txBody>
       </p:sp>
@@ -8070,6 +8236,7 @@
           <a:lstStyle/>
           <a:p>
             <a:pPr algn="ctr"/>
+            <a:endParaRPr/>
           </a:p>
         </p:txBody>
       </p:sp>
@@ -8147,6 +8314,7 @@
           <a:lstStyle/>
           <a:p>
             <a:pPr algn="ctr"/>
+            <a:endParaRPr/>
           </a:p>
         </p:txBody>
       </p:sp>
@@ -8224,6 +8392,7 @@
           <a:lstStyle/>
           <a:p>
             <a:pPr algn="ctr"/>
+            <a:endParaRPr/>
           </a:p>
         </p:txBody>
       </p:sp>
@@ -8301,6 +8470,7 @@
           <a:lstStyle/>
           <a:p>
             <a:pPr algn="ctr"/>
+            <a:endParaRPr/>
           </a:p>
         </p:txBody>
       </p:sp>
@@ -8378,6 +8548,7 @@
           <a:lstStyle/>
           <a:p>
             <a:pPr algn="ctr"/>
+            <a:endParaRPr/>
           </a:p>
         </p:txBody>
       </p:sp>
@@ -8424,7 +8595,7 @@
 </file>
 
 <file path=ppt/slides/slide4.xml><?xml version="1.0" encoding="utf-8"?>
-<p:sld xmlns:a="http://schemas.openxmlformats.org/drawingml/2006/main" xmlns:p="http://schemas.openxmlformats.org/presentationml/2006/main" xmlns:r="http://schemas.openxmlformats.org/officeDocument/2006/relationships">
+<p:sld xmlns:a="http://schemas.openxmlformats.org/drawingml/2006/main" xmlns:r="http://schemas.openxmlformats.org/officeDocument/2006/relationships" xmlns:p="http://schemas.openxmlformats.org/presentationml/2006/main">
   <p:cSld>
     <p:spTree>
       <p:nvGrpSpPr>
@@ -8432,7 +8603,14 @@
         <p:cNvGrpSpPr/>
         <p:nvPr/>
       </p:nvGrpSpPr>
-      <p:grpSpPr/>
+      <p:grpSpPr>
+        <a:xfrm>
+          <a:off x="0" y="0"/>
+          <a:ext cx="0" cy="0"/>
+          <a:chOff x="0" y="0"/>
+          <a:chExt cx="0" cy="0"/>
+        </a:xfrm>
+      </p:grpSpPr>
       <p:sp>
         <p:nvSpPr>
           <p:cNvPr id="2" name="Rectangle 1"/>
@@ -8473,6 +8651,7 @@
           <a:lstStyle/>
           <a:p>
             <a:pPr algn="ctr"/>
+            <a:endParaRPr/>
           </a:p>
         </p:txBody>
       </p:sp>
@@ -8516,6 +8695,7 @@
           <a:lstStyle/>
           <a:p>
             <a:pPr algn="ctr"/>
+            <a:endParaRPr/>
           </a:p>
         </p:txBody>
       </p:sp>
@@ -8559,6 +8739,7 @@
           <a:lstStyle/>
           <a:p>
             <a:pPr algn="ctr"/>
+            <a:endParaRPr/>
           </a:p>
         </p:txBody>
       </p:sp>
@@ -8670,6 +8851,7 @@
           <a:lstStyle/>
           <a:p>
             <a:pPr algn="ctr"/>
+            <a:endParaRPr/>
           </a:p>
         </p:txBody>
       </p:sp>
@@ -8713,6 +8895,7 @@
           <a:lstStyle/>
           <a:p>
             <a:pPr algn="ctr"/>
+            <a:endParaRPr/>
           </a:p>
         </p:txBody>
       </p:sp>
@@ -8756,6 +8939,7 @@
           <a:lstStyle/>
           <a:p>
             <a:pPr algn="ctr"/>
+            <a:endParaRPr/>
           </a:p>
         </p:txBody>
       </p:sp>
@@ -8869,6 +9053,7 @@
           <a:lstStyle/>
           <a:p>
             <a:pPr algn="ctr"/>
+            <a:endParaRPr/>
           </a:p>
         </p:txBody>
       </p:sp>
@@ -8912,6 +9097,7 @@
           <a:lstStyle/>
           <a:p>
             <a:pPr algn="ctr"/>
+            <a:endParaRPr/>
           </a:p>
         </p:txBody>
       </p:sp>
@@ -9093,6 +9279,7 @@
           <a:lstStyle/>
           <a:p>
             <a:pPr algn="ctr"/>
+            <a:endParaRPr/>
           </a:p>
         </p:txBody>
       </p:sp>
@@ -9136,6 +9323,7 @@
           <a:lstStyle/>
           <a:p>
             <a:pPr algn="ctr"/>
+            <a:endParaRPr/>
           </a:p>
         </p:txBody>
       </p:sp>
@@ -9317,6 +9505,7 @@
           <a:lstStyle/>
           <a:p>
             <a:pPr algn="ctr"/>
+            <a:endParaRPr/>
           </a:p>
         </p:txBody>
       </p:sp>
@@ -9360,6 +9549,7 @@
           <a:lstStyle/>
           <a:p>
             <a:pPr algn="ctr"/>
+            <a:endParaRPr/>
           </a:p>
         </p:txBody>
       </p:sp>
@@ -9541,6 +9731,7 @@
           <a:lstStyle/>
           <a:p>
             <a:pPr algn="ctr"/>
+            <a:endParaRPr/>
           </a:p>
         </p:txBody>
       </p:sp>
@@ -9584,6 +9775,7 @@
           <a:lstStyle/>
           <a:p>
             <a:pPr algn="ctr"/>
+            <a:endParaRPr/>
           </a:p>
         </p:txBody>
       </p:sp>
@@ -9732,7 +9924,7 @@
 </file>
 
 <file path=ppt/slides/slide5.xml><?xml version="1.0" encoding="utf-8"?>
-<p:sld xmlns:a="http://schemas.openxmlformats.org/drawingml/2006/main" xmlns:p="http://schemas.openxmlformats.org/presentationml/2006/main" xmlns:r="http://schemas.openxmlformats.org/officeDocument/2006/relationships">
+<p:sld xmlns:a="http://schemas.openxmlformats.org/drawingml/2006/main" xmlns:r="http://schemas.openxmlformats.org/officeDocument/2006/relationships" xmlns:p="http://schemas.openxmlformats.org/presentationml/2006/main">
   <p:cSld>
     <p:spTree>
       <p:nvGrpSpPr>
@@ -9740,7 +9932,14 @@
         <p:cNvGrpSpPr/>
         <p:nvPr/>
       </p:nvGrpSpPr>
-      <p:grpSpPr/>
+      <p:grpSpPr>
+        <a:xfrm>
+          <a:off x="0" y="0"/>
+          <a:ext cx="0" cy="0"/>
+          <a:chOff x="0" y="0"/>
+          <a:chExt cx="0" cy="0"/>
+        </a:xfrm>
+      </p:grpSpPr>
       <p:sp>
         <p:nvSpPr>
           <p:cNvPr id="2" name="Rectangle 1"/>
@@ -9781,6 +9980,7 @@
           <a:lstStyle/>
           <a:p>
             <a:pPr algn="ctr"/>
+            <a:endParaRPr/>
           </a:p>
         </p:txBody>
       </p:sp>
@@ -9824,6 +10024,7 @@
           <a:lstStyle/>
           <a:p>
             <a:pPr algn="ctr"/>
+            <a:endParaRPr/>
           </a:p>
         </p:txBody>
       </p:sp>
@@ -9867,6 +10068,7 @@
           <a:lstStyle/>
           <a:p>
             <a:pPr algn="ctr"/>
+            <a:endParaRPr/>
           </a:p>
         </p:txBody>
       </p:sp>
@@ -9978,6 +10180,7 @@
           <a:lstStyle/>
           <a:p>
             <a:pPr algn="ctr"/>
+            <a:endParaRPr/>
           </a:p>
         </p:txBody>
       </p:sp>
@@ -10021,6 +10224,7 @@
           <a:lstStyle/>
           <a:p>
             <a:pPr algn="ctr"/>
+            <a:endParaRPr/>
           </a:p>
         </p:txBody>
       </p:sp>
@@ -10064,6 +10268,7 @@
           <a:lstStyle/>
           <a:p>
             <a:pPr algn="ctr"/>
+            <a:endParaRPr/>
           </a:p>
         </p:txBody>
       </p:sp>
@@ -10177,6 +10382,7 @@
           <a:lstStyle/>
           <a:p>
             <a:pPr algn="ctr"/>
+            <a:endParaRPr/>
           </a:p>
         </p:txBody>
       </p:sp>
@@ -10220,6 +10426,7 @@
           <a:lstStyle/>
           <a:p>
             <a:pPr algn="ctr"/>
+            <a:endParaRPr/>
           </a:p>
         </p:txBody>
       </p:sp>
@@ -10571,6 +10778,7 @@
           <a:lstStyle/>
           <a:p>
             <a:pPr algn="ctr"/>
+            <a:endParaRPr/>
           </a:p>
         </p:txBody>
       </p:sp>
@@ -10614,6 +10822,7 @@
           <a:lstStyle/>
           <a:p>
             <a:pPr algn="ctr"/>
+            <a:endParaRPr/>
           </a:p>
         </p:txBody>
       </p:sp>
@@ -10965,6 +11174,7 @@
           <a:lstStyle/>
           <a:p>
             <a:pPr algn="ctr"/>
+            <a:endParaRPr/>
           </a:p>
         </p:txBody>
       </p:sp>
@@ -11008,6 +11218,7 @@
           <a:lstStyle/>
           <a:p>
             <a:pPr algn="ctr"/>
+            <a:endParaRPr/>
           </a:p>
         </p:txBody>
       </p:sp>
@@ -11359,6 +11570,7 @@
           <a:lstStyle/>
           <a:p>
             <a:pPr algn="ctr"/>
+            <a:endParaRPr/>
           </a:p>
         </p:txBody>
       </p:sp>
@@ -11402,6 +11614,7 @@
           <a:lstStyle/>
           <a:p>
             <a:pPr algn="ctr"/>
+            <a:endParaRPr/>
           </a:p>
         </p:txBody>
       </p:sp>
@@ -11754,7 +11967,7 @@
 </file>
 
 <file path=ppt/slides/slide6.xml><?xml version="1.0" encoding="utf-8"?>
-<p:sld xmlns:a="http://schemas.openxmlformats.org/drawingml/2006/main" xmlns:p="http://schemas.openxmlformats.org/presentationml/2006/main" xmlns:r="http://schemas.openxmlformats.org/officeDocument/2006/relationships">
+<p:sld xmlns:a="http://schemas.openxmlformats.org/drawingml/2006/main" xmlns:r="http://schemas.openxmlformats.org/officeDocument/2006/relationships" xmlns:p="http://schemas.openxmlformats.org/presentationml/2006/main">
   <p:cSld>
     <p:spTree>
       <p:nvGrpSpPr>
@@ -11762,7 +11975,14 @@
         <p:cNvGrpSpPr/>
         <p:nvPr/>
       </p:nvGrpSpPr>
-      <p:grpSpPr/>
+      <p:grpSpPr>
+        <a:xfrm>
+          <a:off x="0" y="0"/>
+          <a:ext cx="0" cy="0"/>
+          <a:chOff x="0" y="0"/>
+          <a:chExt cx="0" cy="0"/>
+        </a:xfrm>
+      </p:grpSpPr>
       <p:sp>
         <p:nvSpPr>
           <p:cNvPr id="2" name="Rectangle 1"/>
@@ -11803,6 +12023,7 @@
           <a:lstStyle/>
           <a:p>
             <a:pPr algn="ctr"/>
+            <a:endParaRPr/>
           </a:p>
         </p:txBody>
       </p:sp>
@@ -11846,6 +12067,7 @@
           <a:lstStyle/>
           <a:p>
             <a:pPr algn="ctr"/>
+            <a:endParaRPr/>
           </a:p>
         </p:txBody>
       </p:sp>
@@ -11889,6 +12111,7 @@
           <a:lstStyle/>
           <a:p>
             <a:pPr algn="ctr"/>
+            <a:endParaRPr/>
           </a:p>
         </p:txBody>
       </p:sp>
@@ -12000,6 +12223,7 @@
           <a:lstStyle/>
           <a:p>
             <a:pPr algn="ctr"/>
+            <a:endParaRPr/>
           </a:p>
         </p:txBody>
       </p:sp>
@@ -12043,6 +12267,7 @@
           <a:lstStyle/>
           <a:p>
             <a:pPr algn="ctr"/>
+            <a:endParaRPr/>
           </a:p>
         </p:txBody>
       </p:sp>
@@ -12086,6 +12311,7 @@
           <a:lstStyle/>
           <a:p>
             <a:pPr algn="ctr"/>
+            <a:endParaRPr/>
           </a:p>
         </p:txBody>
       </p:sp>
@@ -12197,6 +12423,7 @@
           <a:lstStyle/>
           <a:p>
             <a:pPr algn="ctr"/>
+            <a:endParaRPr/>
           </a:p>
         </p:txBody>
       </p:sp>
@@ -12238,7 +12465,7 @@
           </a:fontRef>
         </p:style>
         <p:txBody>
-          <a:bodyPr rtlCol="0" anchor="ctr" wrap="square" lIns="137160" tIns="109728"/>
+          <a:bodyPr wrap="square" lIns="137160" tIns="109728" rtlCol="0" anchor="ctr"/>
           <a:lstStyle/>
           <a:p>
             <a:pPr algn="ctr"/>
@@ -12313,6 +12540,7 @@
           <a:lstStyle/>
           <a:p>
             <a:pPr algn="ctr"/>
+            <a:endParaRPr/>
           </a:p>
         </p:txBody>
       </p:sp>
@@ -12354,7 +12582,7 @@
           </a:fontRef>
         </p:style>
         <p:txBody>
-          <a:bodyPr rtlCol="0" anchor="ctr" wrap="square" lIns="137160" tIns="109728"/>
+          <a:bodyPr wrap="square" lIns="137160" tIns="109728" rtlCol="0" anchor="ctr"/>
           <a:lstStyle/>
           <a:p>
             <a:pPr algn="ctr"/>
@@ -12429,6 +12657,7 @@
           <a:lstStyle/>
           <a:p>
             <a:pPr algn="ctr"/>
+            <a:endParaRPr/>
           </a:p>
         </p:txBody>
       </p:sp>
@@ -12470,7 +12699,7 @@
           </a:fontRef>
         </p:style>
         <p:txBody>
-          <a:bodyPr rtlCol="0" anchor="ctr" wrap="square" lIns="137160" tIns="109728"/>
+          <a:bodyPr wrap="square" lIns="137160" tIns="109728" rtlCol="0" anchor="ctr"/>
           <a:lstStyle/>
           <a:p>
             <a:pPr algn="ctr"/>
@@ -12545,6 +12774,7 @@
           <a:lstStyle/>
           <a:p>
             <a:pPr algn="ctr"/>
+            <a:endParaRPr/>
           </a:p>
         </p:txBody>
       </p:sp>
@@ -12586,7 +12816,7 @@
           </a:fontRef>
         </p:style>
         <p:txBody>
-          <a:bodyPr rtlCol="0" anchor="ctr" wrap="square" lIns="137160" tIns="109728"/>
+          <a:bodyPr wrap="square" lIns="137160" tIns="109728" rtlCol="0" anchor="ctr"/>
           <a:lstStyle/>
           <a:p>
             <a:pPr algn="ctr"/>
@@ -12640,13 +12870,55 @@
                 <a:tableStyleId>{5C22544A-7EE6-4342-B048-85BDC9FD1C3A}</a:tableStyleId>
               </a:tblPr>
               <a:tblGrid>
-                <a:gridCol w="1593668"/>
-                <a:gridCol w="1593668"/>
-                <a:gridCol w="1593668"/>
-                <a:gridCol w="1593668"/>
-                <a:gridCol w="1593668"/>
-                <a:gridCol w="1593668"/>
-                <a:gridCol w="1593668"/>
+                <a:gridCol w="1593668">
+                  <a:extLst>
+                    <a:ext uri="{9D8B030D-6E8A-4147-A177-3AD203B41FA5}">
+                      <a16:colId xmlns:a16="http://schemas.microsoft.com/office/drawing/2014/main" val="20000"/>
+                    </a:ext>
+                  </a:extLst>
+                </a:gridCol>
+                <a:gridCol w="1593668">
+                  <a:extLst>
+                    <a:ext uri="{9D8B030D-6E8A-4147-A177-3AD203B41FA5}">
+                      <a16:colId xmlns:a16="http://schemas.microsoft.com/office/drawing/2014/main" val="20001"/>
+                    </a:ext>
+                  </a:extLst>
+                </a:gridCol>
+                <a:gridCol w="1593668">
+                  <a:extLst>
+                    <a:ext uri="{9D8B030D-6E8A-4147-A177-3AD203B41FA5}">
+                      <a16:colId xmlns:a16="http://schemas.microsoft.com/office/drawing/2014/main" val="20002"/>
+                    </a:ext>
+                  </a:extLst>
+                </a:gridCol>
+                <a:gridCol w="1593668">
+                  <a:extLst>
+                    <a:ext uri="{9D8B030D-6E8A-4147-A177-3AD203B41FA5}">
+                      <a16:colId xmlns:a16="http://schemas.microsoft.com/office/drawing/2014/main" val="20003"/>
+                    </a:ext>
+                  </a:extLst>
+                </a:gridCol>
+                <a:gridCol w="1593668">
+                  <a:extLst>
+                    <a:ext uri="{9D8B030D-6E8A-4147-A177-3AD203B41FA5}">
+                      <a16:colId xmlns:a16="http://schemas.microsoft.com/office/drawing/2014/main" val="20004"/>
+                    </a:ext>
+                  </a:extLst>
+                </a:gridCol>
+                <a:gridCol w="1593668">
+                  <a:extLst>
+                    <a:ext uri="{9D8B030D-6E8A-4147-A177-3AD203B41FA5}">
+                      <a16:colId xmlns:a16="http://schemas.microsoft.com/office/drawing/2014/main" val="20005"/>
+                    </a:ext>
+                  </a:extLst>
+                </a:gridCol>
+                <a:gridCol w="1593668">
+                  <a:extLst>
+                    <a:ext uri="{9D8B030D-6E8A-4147-A177-3AD203B41FA5}">
+                      <a16:colId xmlns:a16="http://schemas.microsoft.com/office/drawing/2014/main" val="20006"/>
+                    </a:ext>
+                  </a:extLst>
+                </a:gridCol>
               </a:tblGrid>
               <a:tr h="365760">
                 <a:tc>
@@ -12656,7 +12928,7 @@
                     <a:p>
                       <a:pPr algn="ctr"/>
                       <a:r>
-                        <a:rPr b="1" sz="1000">
+                        <a:rPr sz="1000" b="1">
                           <a:solidFill>
                             <a:srgbClr val="FFFFFF"/>
                           </a:solidFill>
@@ -12678,7 +12950,7 @@
                     <a:p>
                       <a:pPr algn="ctr"/>
                       <a:r>
-                        <a:rPr b="1" sz="1000">
+                        <a:rPr sz="1000" b="1">
                           <a:solidFill>
                             <a:srgbClr val="FFFFFF"/>
                           </a:solidFill>
@@ -12700,7 +12972,7 @@
                     <a:p>
                       <a:pPr algn="ctr"/>
                       <a:r>
-                        <a:rPr b="1" sz="1000">
+                        <a:rPr sz="1000" b="1">
                           <a:solidFill>
                             <a:srgbClr val="FFFFFF"/>
                           </a:solidFill>
@@ -12722,7 +12994,7 @@
                     <a:p>
                       <a:pPr algn="ctr"/>
                       <a:r>
-                        <a:rPr b="1" sz="1000">
+                        <a:rPr sz="1000" b="1">
                           <a:solidFill>
                             <a:srgbClr val="FFFFFF"/>
                           </a:solidFill>
@@ -12744,7 +13016,7 @@
                     <a:p>
                       <a:pPr algn="ctr"/>
                       <a:r>
-                        <a:rPr b="1" sz="1000">
+                        <a:rPr sz="1000" b="1">
                           <a:solidFill>
                             <a:srgbClr val="FFFFFF"/>
                           </a:solidFill>
@@ -12766,7 +13038,7 @@
                     <a:p>
                       <a:pPr algn="ctr"/>
                       <a:r>
-                        <a:rPr b="1" sz="1000">
+                        <a:rPr sz="1000" b="1">
                           <a:solidFill>
                             <a:srgbClr val="FFFFFF"/>
                           </a:solidFill>
@@ -12788,7 +13060,7 @@
                     <a:p>
                       <a:pPr algn="ctr"/>
                       <a:r>
-                        <a:rPr b="1" sz="1000">
+                        <a:rPr sz="1000" b="1">
                           <a:solidFill>
                             <a:srgbClr val="FFFFFF"/>
                           </a:solidFill>
@@ -12803,6 +13075,11 @@
                     </a:solidFill>
                   </a:tcPr>
                 </a:tc>
+                <a:extLst>
+                  <a:ext uri="{0D108BD9-81ED-4DB2-BD59-A6C34878D82A}">
+                    <a16:rowId xmlns:a16="http://schemas.microsoft.com/office/drawing/2014/main" val="10000"/>
+                  </a:ext>
+                </a:extLst>
               </a:tr>
               <a:tr h="365760">
                 <a:tc>
@@ -12959,6 +13236,11 @@
                     </a:solidFill>
                   </a:tcPr>
                 </a:tc>
+                <a:extLst>
+                  <a:ext uri="{0D108BD9-81ED-4DB2-BD59-A6C34878D82A}">
+                    <a16:rowId xmlns:a16="http://schemas.microsoft.com/office/drawing/2014/main" val="10001"/>
+                  </a:ext>
+                </a:extLst>
               </a:tr>
               <a:tr h="365760">
                 <a:tc>
@@ -13115,6 +13397,11 @@
                     </a:solidFill>
                   </a:tcPr>
                 </a:tc>
+                <a:extLst>
+                  <a:ext uri="{0D108BD9-81ED-4DB2-BD59-A6C34878D82A}">
+                    <a16:rowId xmlns:a16="http://schemas.microsoft.com/office/drawing/2014/main" val="10002"/>
+                  </a:ext>
+                </a:extLst>
               </a:tr>
               <a:tr h="365760">
                 <a:tc>
@@ -13271,6 +13558,11 @@
                     </a:solidFill>
                   </a:tcPr>
                 </a:tc>
+                <a:extLst>
+                  <a:ext uri="{0D108BD9-81ED-4DB2-BD59-A6C34878D82A}">
+                    <a16:rowId xmlns:a16="http://schemas.microsoft.com/office/drawing/2014/main" val="10003"/>
+                  </a:ext>
+                </a:extLst>
               </a:tr>
               <a:tr h="365760">
                 <a:tc>
@@ -13427,6 +13719,11 @@
                     </a:solidFill>
                   </a:tcPr>
                 </a:tc>
+                <a:extLst>
+                  <a:ext uri="{0D108BD9-81ED-4DB2-BD59-A6C34878D82A}">
+                    <a16:rowId xmlns:a16="http://schemas.microsoft.com/office/drawing/2014/main" val="10004"/>
+                  </a:ext>
+                </a:extLst>
               </a:tr>
               <a:tr h="365760">
                 <a:tc>
@@ -13583,6 +13880,11 @@
                     </a:solidFill>
                   </a:tcPr>
                 </a:tc>
+                <a:extLst>
+                  <a:ext uri="{0D108BD9-81ED-4DB2-BD59-A6C34878D82A}">
+                    <a16:rowId xmlns:a16="http://schemas.microsoft.com/office/drawing/2014/main" val="10005"/>
+                  </a:ext>
+                </a:extLst>
               </a:tr>
               <a:tr h="365760">
                 <a:tc>
@@ -13739,6 +14041,11 @@
                     </a:solidFill>
                   </a:tcPr>
                 </a:tc>
+                <a:extLst>
+                  <a:ext uri="{0D108BD9-81ED-4DB2-BD59-A6C34878D82A}">
+                    <a16:rowId xmlns:a16="http://schemas.microsoft.com/office/drawing/2014/main" val="10006"/>
+                  </a:ext>
+                </a:extLst>
               </a:tr>
             </a:tbl>
           </a:graphicData>
@@ -13787,7 +14094,7 @@
 </file>
 
 <file path=ppt/slides/slide7.xml><?xml version="1.0" encoding="utf-8"?>
-<p:sld xmlns:a="http://schemas.openxmlformats.org/drawingml/2006/main" xmlns:p="http://schemas.openxmlformats.org/presentationml/2006/main" xmlns:r="http://schemas.openxmlformats.org/officeDocument/2006/relationships">
+<p:sld xmlns:a="http://schemas.openxmlformats.org/drawingml/2006/main" xmlns:r="http://schemas.openxmlformats.org/officeDocument/2006/relationships" xmlns:p="http://schemas.openxmlformats.org/presentationml/2006/main">
   <p:cSld>
     <p:spTree>
       <p:nvGrpSpPr>
@@ -13795,7 +14102,14 @@
         <p:cNvGrpSpPr/>
         <p:nvPr/>
       </p:nvGrpSpPr>
-      <p:grpSpPr/>
+      <p:grpSpPr>
+        <a:xfrm>
+          <a:off x="0" y="0"/>
+          <a:ext cx="0" cy="0"/>
+          <a:chOff x="0" y="0"/>
+          <a:chExt cx="0" cy="0"/>
+        </a:xfrm>
+      </p:grpSpPr>
       <p:sp>
         <p:nvSpPr>
           <p:cNvPr id="2" name="Rectangle 1"/>
@@ -13836,6 +14150,7 @@
           <a:lstStyle/>
           <a:p>
             <a:pPr algn="ctr"/>
+            <a:endParaRPr/>
           </a:p>
         </p:txBody>
       </p:sp>
@@ -13879,6 +14194,7 @@
           <a:lstStyle/>
           <a:p>
             <a:pPr algn="ctr"/>
+            <a:endParaRPr/>
           </a:p>
         </p:txBody>
       </p:sp>
@@ -13922,6 +14238,7 @@
           <a:lstStyle/>
           <a:p>
             <a:pPr algn="ctr"/>
+            <a:endParaRPr/>
           </a:p>
         </p:txBody>
       </p:sp>
@@ -14033,6 +14350,7 @@
           <a:lstStyle/>
           <a:p>
             <a:pPr algn="ctr"/>
+            <a:endParaRPr/>
           </a:p>
         </p:txBody>
       </p:sp>
@@ -14076,6 +14394,7 @@
           <a:lstStyle/>
           <a:p>
             <a:pPr algn="ctr"/>
+            <a:endParaRPr/>
           </a:p>
         </p:txBody>
       </p:sp>
@@ -14119,6 +14438,7 @@
           <a:lstStyle/>
           <a:p>
             <a:pPr algn="ctr"/>
+            <a:endParaRPr/>
           </a:p>
         </p:txBody>
       </p:sp>
@@ -14519,7 +14839,7 @@
 </file>
 
 <file path=ppt/slides/slide8.xml><?xml version="1.0" encoding="utf-8"?>
-<p:sld xmlns:a="http://schemas.openxmlformats.org/drawingml/2006/main" xmlns:p="http://schemas.openxmlformats.org/presentationml/2006/main" xmlns:r="http://schemas.openxmlformats.org/officeDocument/2006/relationships">
+<p:sld xmlns:a="http://schemas.openxmlformats.org/drawingml/2006/main" xmlns:r="http://schemas.openxmlformats.org/officeDocument/2006/relationships" xmlns:p="http://schemas.openxmlformats.org/presentationml/2006/main">
   <p:cSld>
     <p:spTree>
       <p:nvGrpSpPr>
@@ -14527,7 +14847,14 @@
         <p:cNvGrpSpPr/>
         <p:nvPr/>
       </p:nvGrpSpPr>
-      <p:grpSpPr/>
+      <p:grpSpPr>
+        <a:xfrm>
+          <a:off x="0" y="0"/>
+          <a:ext cx="0" cy="0"/>
+          <a:chOff x="0" y="0"/>
+          <a:chExt cx="0" cy="0"/>
+        </a:xfrm>
+      </p:grpSpPr>
       <p:sp>
         <p:nvSpPr>
           <p:cNvPr id="2" name="Rectangle 1"/>
@@ -14568,6 +14895,7 @@
           <a:lstStyle/>
           <a:p>
             <a:pPr algn="ctr"/>
+            <a:endParaRPr/>
           </a:p>
         </p:txBody>
       </p:sp>
@@ -14611,6 +14939,7 @@
           <a:lstStyle/>
           <a:p>
             <a:pPr algn="ctr"/>
+            <a:endParaRPr/>
           </a:p>
         </p:txBody>
       </p:sp>
@@ -14654,6 +14983,7 @@
           <a:lstStyle/>
           <a:p>
             <a:pPr algn="ctr"/>
+            <a:endParaRPr/>
           </a:p>
         </p:txBody>
       </p:sp>
@@ -14765,6 +15095,7 @@
           <a:lstStyle/>
           <a:p>
             <a:pPr algn="ctr"/>
+            <a:endParaRPr/>
           </a:p>
         </p:txBody>
       </p:sp>
@@ -14808,6 +15139,7 @@
           <a:lstStyle/>
           <a:p>
             <a:pPr algn="ctr"/>
+            <a:endParaRPr/>
           </a:p>
         </p:txBody>
       </p:sp>
@@ -14851,6 +15183,7 @@
           <a:lstStyle/>
           <a:p>
             <a:pPr algn="ctr"/>
+            <a:endParaRPr/>
           </a:p>
         </p:txBody>
       </p:sp>
@@ -14975,11 +15308,41 @@
                 <a:tableStyleId>{5C22544A-7EE6-4342-B048-85BDC9FD1C3A}</a:tableStyleId>
               </a:tblPr>
               <a:tblGrid>
-                <a:gridCol w="1316736"/>
-                <a:gridCol w="1316736"/>
-                <a:gridCol w="1316736"/>
-                <a:gridCol w="1316736"/>
-                <a:gridCol w="1316736"/>
+                <a:gridCol w="1316736">
+                  <a:extLst>
+                    <a:ext uri="{9D8B030D-6E8A-4147-A177-3AD203B41FA5}">
+                      <a16:colId xmlns:a16="http://schemas.microsoft.com/office/drawing/2014/main" val="20000"/>
+                    </a:ext>
+                  </a:extLst>
+                </a:gridCol>
+                <a:gridCol w="1316736">
+                  <a:extLst>
+                    <a:ext uri="{9D8B030D-6E8A-4147-A177-3AD203B41FA5}">
+                      <a16:colId xmlns:a16="http://schemas.microsoft.com/office/drawing/2014/main" val="20001"/>
+                    </a:ext>
+                  </a:extLst>
+                </a:gridCol>
+                <a:gridCol w="1316736">
+                  <a:extLst>
+                    <a:ext uri="{9D8B030D-6E8A-4147-A177-3AD203B41FA5}">
+                      <a16:colId xmlns:a16="http://schemas.microsoft.com/office/drawing/2014/main" val="20002"/>
+                    </a:ext>
+                  </a:extLst>
+                </a:gridCol>
+                <a:gridCol w="1316736">
+                  <a:extLst>
+                    <a:ext uri="{9D8B030D-6E8A-4147-A177-3AD203B41FA5}">
+                      <a16:colId xmlns:a16="http://schemas.microsoft.com/office/drawing/2014/main" val="20003"/>
+                    </a:ext>
+                  </a:extLst>
+                </a:gridCol>
+                <a:gridCol w="1316736">
+                  <a:extLst>
+                    <a:ext uri="{9D8B030D-6E8A-4147-A177-3AD203B41FA5}">
+                      <a16:colId xmlns:a16="http://schemas.microsoft.com/office/drawing/2014/main" val="20004"/>
+                    </a:ext>
+                  </a:extLst>
+                </a:gridCol>
               </a:tblGrid>
               <a:tr h="461356">
                 <a:tc>
@@ -14989,7 +15352,7 @@
                     <a:p>
                       <a:pPr algn="ctr"/>
                       <a:r>
-                        <a:rPr b="1" sz="950">
+                        <a:rPr sz="950" b="1">
                           <a:solidFill>
                             <a:srgbClr val="FFFFFF"/>
                           </a:solidFill>
@@ -15011,7 +15374,7 @@
                     <a:p>
                       <a:pPr algn="ctr"/>
                       <a:r>
-                        <a:rPr b="1" sz="950">
+                        <a:rPr sz="950" b="1">
                           <a:solidFill>
                             <a:srgbClr val="FFFFFF"/>
                           </a:solidFill>
@@ -15033,7 +15396,7 @@
                     <a:p>
                       <a:pPr algn="ctr"/>
                       <a:r>
-                        <a:rPr b="1" sz="950">
+                        <a:rPr sz="950" b="1">
                           <a:solidFill>
                             <a:srgbClr val="FFFFFF"/>
                           </a:solidFill>
@@ -15055,7 +15418,7 @@
                     <a:p>
                       <a:pPr algn="ctr"/>
                       <a:r>
-                        <a:rPr b="1" sz="950">
+                        <a:rPr sz="950" b="1">
                           <a:solidFill>
                             <a:srgbClr val="FFFFFF"/>
                           </a:solidFill>
@@ -15077,7 +15440,7 @@
                     <a:p>
                       <a:pPr algn="ctr"/>
                       <a:r>
-                        <a:rPr b="1" sz="950">
+                        <a:rPr sz="950" b="1">
                           <a:solidFill>
                             <a:srgbClr val="FFFFFF"/>
                           </a:solidFill>
@@ -15092,6 +15455,11 @@
                     </a:solidFill>
                   </a:tcPr>
                 </a:tc>
+                <a:extLst>
+                  <a:ext uri="{0D108BD9-81ED-4DB2-BD59-A6C34878D82A}">
+                    <a16:rowId xmlns:a16="http://schemas.microsoft.com/office/drawing/2014/main" val="10000"/>
+                  </a:ext>
+                </a:extLst>
               </a:tr>
               <a:tr h="461356">
                 <a:tc>
@@ -15204,6 +15572,11 @@
                     </a:solidFill>
                   </a:tcPr>
                 </a:tc>
+                <a:extLst>
+                  <a:ext uri="{0D108BD9-81ED-4DB2-BD59-A6C34878D82A}">
+                    <a16:rowId xmlns:a16="http://schemas.microsoft.com/office/drawing/2014/main" val="10001"/>
+                  </a:ext>
+                </a:extLst>
               </a:tr>
               <a:tr h="461356">
                 <a:tc>
@@ -15316,6 +15689,11 @@
                     </a:solidFill>
                   </a:tcPr>
                 </a:tc>
+                <a:extLst>
+                  <a:ext uri="{0D108BD9-81ED-4DB2-BD59-A6C34878D82A}">
+                    <a16:rowId xmlns:a16="http://schemas.microsoft.com/office/drawing/2014/main" val="10002"/>
+                  </a:ext>
+                </a:extLst>
               </a:tr>
               <a:tr h="461356">
                 <a:tc>
@@ -15428,6 +15806,11 @@
                     </a:solidFill>
                   </a:tcPr>
                 </a:tc>
+                <a:extLst>
+                  <a:ext uri="{0D108BD9-81ED-4DB2-BD59-A6C34878D82A}">
+                    <a16:rowId xmlns:a16="http://schemas.microsoft.com/office/drawing/2014/main" val="10003"/>
+                  </a:ext>
+                </a:extLst>
               </a:tr>
               <a:tr h="461356">
                 <a:tc>
@@ -15540,6 +15923,11 @@
                     </a:solidFill>
                   </a:tcPr>
                 </a:tc>
+                <a:extLst>
+                  <a:ext uri="{0D108BD9-81ED-4DB2-BD59-A6C34878D82A}">
+                    <a16:rowId xmlns:a16="http://schemas.microsoft.com/office/drawing/2014/main" val="10004"/>
+                  </a:ext>
+                </a:extLst>
               </a:tr>
               <a:tr h="461356">
                 <a:tc>
@@ -15652,6 +16040,11 @@
                     </a:solidFill>
                   </a:tcPr>
                 </a:tc>
+                <a:extLst>
+                  <a:ext uri="{0D108BD9-81ED-4DB2-BD59-A6C34878D82A}">
+                    <a16:rowId xmlns:a16="http://schemas.microsoft.com/office/drawing/2014/main" val="10005"/>
+                  </a:ext>
+                </a:extLst>
               </a:tr>
               <a:tr h="461356">
                 <a:tc>
@@ -15764,6 +16157,11 @@
                     </a:solidFill>
                   </a:tcPr>
                 </a:tc>
+                <a:extLst>
+                  <a:ext uri="{0D108BD9-81ED-4DB2-BD59-A6C34878D82A}">
+                    <a16:rowId xmlns:a16="http://schemas.microsoft.com/office/drawing/2014/main" val="10006"/>
+                  </a:ext>
+                </a:extLst>
               </a:tr>
               <a:tr h="461356">
                 <a:tc>
@@ -15876,6 +16274,11 @@
                     </a:solidFill>
                   </a:tcPr>
                 </a:tc>
+                <a:extLst>
+                  <a:ext uri="{0D108BD9-81ED-4DB2-BD59-A6C34878D82A}">
+                    <a16:rowId xmlns:a16="http://schemas.microsoft.com/office/drawing/2014/main" val="10007"/>
+                  </a:ext>
+                </a:extLst>
               </a:tr>
               <a:tr h="461356">
                 <a:tc>
@@ -15988,6 +16391,11 @@
                     </a:solidFill>
                   </a:tcPr>
                 </a:tc>
+                <a:extLst>
+                  <a:ext uri="{0D108BD9-81ED-4DB2-BD59-A6C34878D82A}">
+                    <a16:rowId xmlns:a16="http://schemas.microsoft.com/office/drawing/2014/main" val="10008"/>
+                  </a:ext>
+                </a:extLst>
               </a:tr>
               <a:tr h="461356">
                 <a:tc>
@@ -16100,6 +16508,11 @@
                     </a:solidFill>
                   </a:tcPr>
                 </a:tc>
+                <a:extLst>
+                  <a:ext uri="{0D108BD9-81ED-4DB2-BD59-A6C34878D82A}">
+                    <a16:rowId xmlns:a16="http://schemas.microsoft.com/office/drawing/2014/main" val="10009"/>
+                  </a:ext>
+                </a:extLst>
               </a:tr>
               <a:tr h="461360">
                 <a:tc>
@@ -16212,6 +16625,11 @@
                     </a:solidFill>
                   </a:tcPr>
                 </a:tc>
+                <a:extLst>
+                  <a:ext uri="{0D108BD9-81ED-4DB2-BD59-A6C34878D82A}">
+                    <a16:rowId xmlns:a16="http://schemas.microsoft.com/office/drawing/2014/main" val="10010"/>
+                  </a:ext>
+                </a:extLst>
               </a:tr>
             </a:tbl>
           </a:graphicData>
@@ -16293,6 +16711,7 @@
           <a:lstStyle/>
           <a:p>
             <a:pPr algn="ctr"/>
+            <a:endParaRPr/>
           </a:p>
         </p:txBody>
       </p:sp>
@@ -16440,6 +16859,7 @@
           <a:lstStyle/>
           <a:p>
             <a:pPr algn="ctr"/>
+            <a:endParaRPr/>
           </a:p>
         </p:txBody>
       </p:sp>
@@ -16587,6 +17007,7 @@
           <a:lstStyle/>
           <a:p>
             <a:pPr algn="ctr"/>
+            <a:endParaRPr/>
           </a:p>
         </p:txBody>
       </p:sp>
@@ -16734,6 +17155,7 @@
           <a:lstStyle/>
           <a:p>
             <a:pPr algn="ctr"/>
+            <a:endParaRPr/>
           </a:p>
         </p:txBody>
       </p:sp>
@@ -16881,6 +17303,7 @@
           <a:lstStyle/>
           <a:p>
             <a:pPr algn="ctr"/>
+            <a:endParaRPr/>
           </a:p>
         </p:txBody>
       </p:sp>
@@ -17028,6 +17451,7 @@
           <a:lstStyle/>
           <a:p>
             <a:pPr algn="ctr"/>
+            <a:endParaRPr/>
           </a:p>
         </p:txBody>
       </p:sp>
@@ -17176,7 +17600,7 @@
 </file>
 
 <file path=ppt/slides/slide9.xml><?xml version="1.0" encoding="utf-8"?>
-<p:sld xmlns:a="http://schemas.openxmlformats.org/drawingml/2006/main" xmlns:p="http://schemas.openxmlformats.org/presentationml/2006/main" xmlns:r="http://schemas.openxmlformats.org/officeDocument/2006/relationships">
+<p:sld xmlns:a="http://schemas.openxmlformats.org/drawingml/2006/main" xmlns:r="http://schemas.openxmlformats.org/officeDocument/2006/relationships" xmlns:p="http://schemas.openxmlformats.org/presentationml/2006/main">
   <p:cSld>
     <p:spTree>
       <p:nvGrpSpPr>
@@ -17184,7 +17608,14 @@
         <p:cNvGrpSpPr/>
         <p:nvPr/>
       </p:nvGrpSpPr>
-      <p:grpSpPr/>
+      <p:grpSpPr>
+        <a:xfrm>
+          <a:off x="0" y="0"/>
+          <a:ext cx="0" cy="0"/>
+          <a:chOff x="0" y="0"/>
+          <a:chExt cx="0" cy="0"/>
+        </a:xfrm>
+      </p:grpSpPr>
       <p:sp>
         <p:nvSpPr>
           <p:cNvPr id="2" name="Rectangle 1"/>
@@ -17225,6 +17656,7 @@
           <a:lstStyle/>
           <a:p>
             <a:pPr algn="ctr"/>
+            <a:endParaRPr/>
           </a:p>
         </p:txBody>
       </p:sp>
@@ -17268,6 +17700,7 @@
           <a:lstStyle/>
           <a:p>
             <a:pPr algn="ctr"/>
+            <a:endParaRPr/>
           </a:p>
         </p:txBody>
       </p:sp>
@@ -17311,6 +17744,7 @@
           <a:lstStyle/>
           <a:p>
             <a:pPr algn="ctr"/>
+            <a:endParaRPr/>
           </a:p>
         </p:txBody>
       </p:sp>
@@ -17422,6 +17856,7 @@
           <a:lstStyle/>
           <a:p>
             <a:pPr algn="ctr"/>
+            <a:endParaRPr/>
           </a:p>
         </p:txBody>
       </p:sp>
@@ -17465,6 +17900,7 @@
           <a:lstStyle/>
           <a:p>
             <a:pPr algn="ctr"/>
+            <a:endParaRPr/>
           </a:p>
         </p:txBody>
       </p:sp>
@@ -17508,6 +17944,7 @@
           <a:lstStyle/>
           <a:p>
             <a:pPr algn="ctr"/>
+            <a:endParaRPr/>
           </a:p>
         </p:txBody>
       </p:sp>
@@ -17621,6 +18058,7 @@
           <a:lstStyle/>
           <a:p>
             <a:pPr algn="ctr"/>
+            <a:endParaRPr/>
           </a:p>
         </p:txBody>
       </p:sp>
@@ -17664,6 +18102,7 @@
           <a:lstStyle/>
           <a:p>
             <a:pPr algn="ctr"/>
+            <a:endParaRPr/>
           </a:p>
         </p:txBody>
       </p:sp>
@@ -17777,6 +18216,7 @@
           <a:lstStyle/>
           <a:p>
             <a:pPr algn="ctr"/>
+            <a:endParaRPr/>
           </a:p>
         </p:txBody>
       </p:sp>
@@ -17820,6 +18260,7 @@
           <a:lstStyle/>
           <a:p>
             <a:pPr algn="ctr"/>
+            <a:endParaRPr/>
           </a:p>
         </p:txBody>
       </p:sp>
@@ -17933,6 +18374,7 @@
           <a:lstStyle/>
           <a:p>
             <a:pPr algn="ctr"/>
+            <a:endParaRPr/>
           </a:p>
         </p:txBody>
       </p:sp>
@@ -17976,6 +18418,7 @@
           <a:lstStyle/>
           <a:p>
             <a:pPr algn="ctr"/>
+            <a:endParaRPr/>
           </a:p>
         </p:txBody>
       </p:sp>
@@ -18089,6 +18532,7 @@
           <a:lstStyle/>
           <a:p>
             <a:pPr algn="ctr"/>
+            <a:endParaRPr/>
           </a:p>
         </p:txBody>
       </p:sp>
@@ -18132,6 +18576,7 @@
           <a:lstStyle/>
           <a:p>
             <a:pPr algn="ctr"/>
+            <a:endParaRPr/>
           </a:p>
         </p:txBody>
       </p:sp>
@@ -18245,6 +18690,7 @@
           <a:lstStyle/>
           <a:p>
             <a:pPr algn="ctr"/>
+            <a:endParaRPr/>
           </a:p>
         </p:txBody>
       </p:sp>
@@ -18288,6 +18734,7 @@
           <a:lstStyle/>
           <a:p>
             <a:pPr algn="ctr"/>
+            <a:endParaRPr/>
           </a:p>
         </p:txBody>
       </p:sp>
@@ -18401,6 +18848,7 @@
           <a:lstStyle/>
           <a:p>
             <a:pPr algn="ctr"/>
+            <a:endParaRPr/>
           </a:p>
         </p:txBody>
       </p:sp>
